--- a/presentation/Udyog-drishti_AI_Seva_2026.pptx
+++ b/presentation/Udyog-drishti_AI_Seva_2026.pptx
@@ -1212,7 +1212,7 @@
                 <a:ea typeface="Nirmala UI" pitchFamily="34" charset="-122"/>
                 <a:cs typeface="Nirmala UI" pitchFamily="34" charset="-120"/>
               </a:rPr>
-              <a:t>Every big chimney in Maharashtra, checked from space each month: where to inspect first, and whether a scrubber worked. Independent of the plants' own monitors.</a:t>
+              <a:t>A monthly satellite check of SO₂ and NO₂ at Maharashtra's large coal power plants and industrial areas: where to inspect first, and whether a scrubber worked. Independent of the plants' own monitors.</a:t>
             </a:r>
             <a:endParaRPr lang="en-US" sz="1200" dirty="0"/>
           </a:p>
@@ -1480,7 +1480,7 @@
                 </a:solidFill>
                 <a:latin typeface="Nirmala UI"/>
               </a:rPr>
-              <a:t>• Sentinel-5P SO₂ and NO₂; spotted NTPC Mauda's scrubber</a:t>
+              <a:t>• Sentinel-5P SO₂ and NO₂; agrees with plants' official filings</a:t>
             </a:r>
           </a:p>
           <a:p>
@@ -2156,7 +2156,7 @@
                 <a:ea typeface="Nirmala UI" pitchFamily="34" charset="-122"/>
                 <a:cs typeface="Nirmala UI" pitchFamily="34" charset="-120"/>
               </a:rPr>
-              <a:t>Chandrapur and Koradi</a:t>
+              <a:t>Chandrapur</a:t>
             </a:r>
             <a:r>
               <a:rPr lang="en-US" sz="950" i="0" dirty="0" b="0">
@@ -2167,7 +2167,29 @@
                 <a:ea typeface="Nirmala UI" pitchFamily="34" charset="-122"/>
                 <a:cs typeface="Nirmala UI" pitchFamily="34" charset="-120"/>
               </a:rPr>
-              <a:t>: among India's top SO₂ hotspots in NASA data</a:t>
+              <a:t>: own stack reports show SO₂ </a:t>
+            </a:r>
+            <a:r>
+              <a:rPr lang="en-US" sz="950" i="0" dirty="0" b="1">
+                <a:solidFill>
+                  <a:srgbClr val="1F2937"/>
+                </a:solidFill>
+                <a:latin typeface="Nirmala UI" pitchFamily="34" charset="0"/>
+                <a:ea typeface="Nirmala UI" pitchFamily="34" charset="-122"/>
+                <a:cs typeface="Nirmala UI" pitchFamily="34" charset="-120"/>
+              </a:rPr>
+              <a:t>~6× the limit</a:t>
+            </a:r>
+            <a:r>
+              <a:rPr lang="en-US" sz="950" i="0" dirty="0" b="0">
+                <a:solidFill>
+                  <a:srgbClr val="1F2937"/>
+                </a:solidFill>
+                <a:latin typeface="Nirmala UI" pitchFamily="34" charset="0"/>
+                <a:ea typeface="Nirmala UI" pitchFamily="34" charset="-122"/>
+                <a:cs typeface="Nirmala UI" pitchFamily="34" charset="-120"/>
+              </a:rPr>
+              <a:t> (2024–26)</a:t>
             </a:r>
           </a:p>
           <a:p>
@@ -2627,7 +2649,7 @@
                 </a:solidFill>
                 <a:latin typeface="Nirmala UI"/>
               </a:rPr>
-              <a:t>Sources: MoEFCC notification, 11 Jul 2025; Greenpeace analysis of NASA OMI data; TechTimes analysis of CPCB data, Aug 2026; CEEW 2024 and CSE on OCEMS; CREA, Jul 2026.</a:t>
+              <a:t>Sources: MoEFCC notification, 11 Jul 2025; Mahagenco CSTPS EC compliance reports to MoEF&amp;CC, 2024–26; TechTimes analysis of CPCB data, Aug 2026; CEEW 2024 and CSE on OCEMS; CREA, Jul 2026.</a:t>
             </a:r>
           </a:p>
         </p:txBody>
@@ -4871,7 +4893,7 @@
                 <a:ea typeface="Nirmala UI" pitchFamily="34" charset="-122"/>
                 <a:cs typeface="Nirmala UI" pitchFamily="34" charset="-120"/>
               </a:rPr>
-              <a:t>Does not rely on the polluter's own data. It spotted the scrubber at </a:t>
+              <a:t>Independent of the polluter's data, yet it agrees with official filings: </a:t>
             </a:r>
             <a:r>
               <a:rPr lang="en-US" sz="950" i="0" dirty="0" b="1">
@@ -4882,7 +4904,7 @@
                 <a:ea typeface="Nirmala UI" pitchFamily="34" charset="-122"/>
                 <a:cs typeface="Nirmala UI" pitchFamily="34" charset="-120"/>
               </a:rPr>
-              <a:t>NTPC Mauda</a:t>
+              <a:t>Chandrapur</a:t>
             </a:r>
             <a:r>
               <a:rPr lang="en-US" sz="950" i="0" dirty="0" b="0">
@@ -4893,7 +4915,7 @@
                 <a:ea typeface="Nirmala UI" pitchFamily="34" charset="-122"/>
                 <a:cs typeface="Nirmala UI" pitchFamily="34" charset="-120"/>
               </a:rPr>
-              <a:t> from space: SO₂ ÷ NO₂ fell </a:t>
+              <a:t> (flagged here) reports SO₂ ~6× the limit; </a:t>
             </a:r>
             <a:r>
               <a:rPr lang="en-US" sz="950" i="0" dirty="0" b="1">
@@ -4904,7 +4926,7 @@
                 <a:ea typeface="Nirmala UI" pitchFamily="34" charset="-122"/>
                 <a:cs typeface="Nirmala UI" pitchFamily="34" charset="-120"/>
               </a:rPr>
-              <a:t>38%</a:t>
+              <a:t>Mauda's</a:t>
             </a:r>
             <a:r>
               <a:rPr lang="en-US" sz="950" i="0" dirty="0" b="0">
@@ -4915,7 +4937,7 @@
                 <a:ea typeface="Nirmala UI" pitchFamily="34" charset="-122"/>
                 <a:cs typeface="Nirmala UI" pitchFamily="34" charset="-120"/>
               </a:rPr>
-              <a:t> since 2025 vs 8% at exempt plants. Mauda's FGD was then confirmed in service.</a:t>
+              <a:t> SO₂ ÷ NO₂ fell 38% vs 14% at unscrubbed plants, and NTPC confirms its scrubbers.</a:t>
             </a:r>
             <a:endParaRPr lang="en-US" sz="1000" dirty="0"/>
           </a:p>
@@ -7083,7 +7105,7 @@
                 <a:ea typeface="Nirmala UI" pitchFamily="34" charset="-122"/>
                 <a:cs typeface="Nirmala UI" pitchFamily="34" charset="-120"/>
               </a:rPr>
-              <a:t>−30%</a:t>
+              <a:t>3 of 3</a:t>
             </a:r>
             <a:endParaRPr lang="en-US" sz="3000" dirty="0"/>
           </a:p>
@@ -7125,7 +7147,7 @@
                 <a:ea typeface="Nirmala UI" pitchFamily="34" charset="-122"/>
                 <a:cs typeface="Nirmala UI" pitchFamily="34" charset="-120"/>
               </a:rPr>
-              <a:t>Scrubber seen from space</a:t>
+              <a:t>Checks vs official filings</a:t>
             </a:r>
             <a:endParaRPr lang="en-US" sz="1100" dirty="0"/>
           </a:p>
@@ -7167,7 +7189,7 @@
                 <a:ea typeface="Nirmala UI" pitchFamily="34" charset="-122"/>
                 <a:cs typeface="Nirmala UI" pitchFamily="34" charset="-120"/>
               </a:rPr>
-              <a:t>NTPC Mauda, SO₂ ÷ NO₂ vs exempt plants</a:t>
+              <a:t>Chandrapur, Koradi, Mauda agree with stack and scrubber records</a:t>
             </a:r>
             <a:endParaRPr lang="en-US" sz="900" dirty="0"/>
           </a:p>
@@ -7662,7 +7684,7 @@
                 </a:solidFill>
                 <a:latin typeface="Nirmala UI"/>
               </a:rPr>
-              <a:t>Sources: Global Power Plant Database (capacity); Udyog-drishti run, Jan 2019–Sep 2026; The Live Nagpur, 23 Oct 2026 (Mauda FGD in service). Server cost is an estimate.</a:t>
+              <a:t>Sources: Global Power Plant Database (capacity); Udyog-drishti run, Jan 2019–Sep 2026; Mahagenco and NTPC EC compliance reports to MoEF&amp;CC (2024–26). Server cost is an estimate.</a:t>
             </a:r>
           </a:p>
         </p:txBody>

--- a/presentation/Udyog-drishti_AI_Seva_2026.pptx
+++ b/presentation/Udyog-drishti_AI_Seva_2026.pptx
@@ -6410,7 +6410,7 @@
                 <a:ea typeface="Nirmala UI" pitchFamily="34" charset="-122"/>
                 <a:cs typeface="Nirmala UI" pitchFamily="34" charset="-120"/>
               </a:rPr>
-              <a:t>MRSAC, Nagpur; IIIT Nagpur</a:t>
+              <a:t>MRSAC, Nagpur (state remote sensing centre)</a:t>
             </a:r>
           </a:p>
         </p:txBody>

--- a/presentation/Udyog-drishti_AI_Seva_2026.pptx
+++ b/presentation/Udyog-drishti_AI_Seva_2026.pptx
@@ -1504,8 +1504,9 @@
                   <a:srgbClr val="F28C28"/>
                 </a:solidFill>
                 <a:latin typeface="Nirmala UI"/>
-              </a:rPr>
-              <a:t>[deployment link]</a:t>
+                <a:hlinkClick r:id="rId4"/>
+              </a:rPr>
+              <a:t>udyog-drishti.onrender.com</a:t>
             </a:r>
           </a:p>
         </p:txBody>
@@ -6488,8 +6489,9 @@
                   <a:srgbClr val="F28C28"/>
                 </a:solidFill>
                 <a:latin typeface="Nirmala UI"/>
-              </a:rPr>
-              <a:t>[deployment link]</a:t>
+                <a:hlinkClick r:id="rId3"/>
+              </a:rPr>
+              <a:t>udyog-drishti.onrender.com</a:t>
             </a:r>
           </a:p>
         </p:txBody>
@@ -9151,8 +9153,9 @@
                 <a:latin typeface="Nirmala UI" pitchFamily="34" charset="0"/>
                 <a:ea typeface="Nirmala UI" pitchFamily="34" charset="-122"/>
                 <a:cs typeface="Nirmala UI" pitchFamily="34" charset="-120"/>
-              </a:rPr>
-              <a:t>[deployment link]</a:t>
+                <a:hlinkClick r:id="rId3"/>
+              </a:rPr>
+              <a:t>udyog-drishti.onrender.com</a:t>
             </a:r>
           </a:p>
         </p:txBody>

--- a/presentation/Udyog-drishti_AI_Seva_2026.pptx
+++ b/presentation/Udyog-drishti_AI_Seva_2026.pptx
@@ -9347,10 +9347,10 @@
         <a:srgbClr val="70AD47"/>
       </a:accent6>
       <a:hlink>
-        <a:srgbClr val="0563C1"/>
+        <a:srgbClr val="F28C28"/>
       </a:hlink>
       <a:folHlink>
-        <a:srgbClr val="954F72"/>
+        <a:srgbClr val="F28C28"/>
       </a:folHlink>
     </a:clrScheme>
     <a:fontScheme name="Office">

--- a/presentation/Udyog-drishti_AI_Seva_2026.pptx
+++ b/presentation/Udyog-drishti_AI_Seva_2026.pptx
@@ -6300,10 +6300,13 @@
           <a:lstStyle/>
           <a:p>
             <a:pPr marL="0" indent="0">
+              <a:spcAft>
+                <a:spcPts val="300"/>
+              </a:spcAft>
               <a:buNone/>
             </a:pPr>
             <a:r>
-              <a:rPr lang="en-US" sz="1200" b="1" dirty="0">
+              <a:rPr lang="en-US" sz="1200" b="1" dirty="0" i="0">
                 <a:solidFill>
                   <a:srgbClr val="1B2A5C"/>
                 </a:solidFill>
@@ -6311,7 +6314,7 @@
                 <a:ea typeface="Nirmala UI" pitchFamily="34" charset="-122"/>
                 <a:cs typeface="Nirmala UI" pitchFamily="34" charset="-120"/>
               </a:rPr>
-              <a:t>Partners</a:t>
+              <a:t>Partners to approach</a:t>
             </a:r>
             <a:endParaRPr lang="en-US" sz="1200" dirty="0"/>
           </a:p>

--- a/presentation/Udyog-drishti_AI_Seva_2026.pptx
+++ b/presentation/Udyog-drishti_AI_Seva_2026.pptx
@@ -1364,7 +1364,7 @@
                 </a:solidFill>
                 <a:latin typeface="Nirmala UI"/>
               </a:rPr>
-              <a:t>Sujal Chondekar  ·  Kshitij Mehrotra</a:t>
+              <a:t>Sujal Chondekar · Kshitij Mehrotra · Sandeep Mataghare · Sanchay Hira</a:t>
             </a:r>
           </a:p>
           <a:p>
@@ -8446,7 +8446,7 @@
                 <a:ea typeface="Nirmala UI" pitchFamily="34" charset="-122"/>
                 <a:cs typeface="Nirmala UI" pitchFamily="34" charset="-120"/>
               </a:rPr>
-              <a:t>SH</a:t>
+              <a:t>SM</a:t>
             </a:r>
             <a:endParaRPr lang="en-US" sz="700" dirty="0"/>
           </a:p>
@@ -8488,7 +8488,7 @@
                 <a:ea typeface="Nirmala UI" pitchFamily="34" charset="-122"/>
                 <a:cs typeface="Nirmala UI" pitchFamily="34" charset="-120"/>
               </a:rPr>
-              <a:t>Dr. Swati Hira</a:t>
+              <a:t>Sandeep Mataghare</a:t>
             </a:r>
             <a:endParaRPr lang="en-US" sz="1050" dirty="0"/>
           </a:p>
@@ -8530,7 +8530,7 @@
                 <a:ea typeface="Nirmala UI" pitchFamily="34" charset="-122"/>
                 <a:cs typeface="Nirmala UI" pitchFamily="34" charset="-120"/>
               </a:rPr>
-              <a:t>Faculty mentor</a:t>
+              <a:t>Team member</a:t>
             </a:r>
             <a:endParaRPr lang="en-US" sz="900" dirty="0"/>
           </a:p>
@@ -8572,7 +8572,7 @@
                 <a:ea typeface="Nirmala UI" pitchFamily="34" charset="-122"/>
                 <a:cs typeface="Nirmala UI" pitchFamily="34" charset="-120"/>
               </a:rPr>
-              <a:t>Assistant Professor, CSE, IIIT Nagpur</a:t>
+              <a:t/>
             </a:r>
             <a:endParaRPr lang="en-US" sz="850" dirty="0"/>
           </a:p>
@@ -8580,14 +8580,122 @@
       </p:sp>
       <p:sp>
         <p:nvSpPr>
-          <p:cNvPr id="30" name="Text 28"/>
-          <p:cNvSpPr txBox="1"/>
-          <p:nvPr/>
-        </p:nvSpPr>
-        <p:spPr>
-          <a:xfrm>
-            <a:off x="457200" y="3840480"/>
-            <a:ext cx="4389120" cy="274320"/>
+          <p:cNvPr id="24" name="Shape 22"/>
+          <p:cNvSpPr/>
+          <p:nvPr/>
+        </p:nvSpPr>
+        <p:spPr>
+          <a:xfrm>
+            <a:off x="2697480" y="2468880"/>
+            <a:ext cx="2103120" cy="1143000"/>
+          </a:xfrm>
+          <a:prstGeom prst="roundRect">
+            <a:avLst>
+              <a:gd name="adj" fmla="val 6400"/>
+            </a:avLst>
+          </a:prstGeom>
+          <a:solidFill>
+            <a:srgbClr val="253870"/>
+          </a:solidFill>
+          <a:ln w="12700">
+            <a:solidFill>
+              <a:srgbClr val="253870"/>
+            </a:solidFill>
+            <a:prstDash val="solid"/>
+          </a:ln>
+        </p:spPr>
+        <p:txBody>
+          <a:bodyPr/>
+          <a:lstStyle/>
+          <a:p>
+            <a:endParaRPr lang="en-IN"/>
+          </a:p>
+        </p:txBody>
+      </p:sp>
+      <p:sp>
+        <p:nvSpPr>
+          <p:cNvPr id="25" name="Shape 23"/>
+          <p:cNvSpPr/>
+          <p:nvPr/>
+        </p:nvSpPr>
+        <p:spPr>
+          <a:xfrm>
+            <a:off x="2834640" y="2651760"/>
+            <a:ext cx="502920" cy="502920"/>
+          </a:xfrm>
+          <a:prstGeom prst="ellipse">
+            <a:avLst/>
+          </a:prstGeom>
+          <a:solidFill>
+            <a:srgbClr val="3A4C85"/>
+          </a:solidFill>
+          <a:ln w="12700">
+            <a:solidFill>
+              <a:srgbClr val="F28C28"/>
+            </a:solidFill>
+            <a:prstDash val="solid"/>
+          </a:ln>
+        </p:spPr>
+        <p:txBody>
+          <a:bodyPr/>
+          <a:lstStyle/>
+          <a:p>
+            <a:endParaRPr lang="en-IN"/>
+          </a:p>
+        </p:txBody>
+      </p:sp>
+      <p:sp>
+        <p:nvSpPr>
+          <p:cNvPr id="26" name="Text 24"/>
+          <p:cNvSpPr txBox="1"/>
+          <p:nvPr/>
+        </p:nvSpPr>
+        <p:spPr>
+          <a:xfrm>
+            <a:off x="2834640" y="2651760"/>
+            <a:ext cx="502920" cy="502920"/>
+          </a:xfrm>
+          <a:prstGeom prst="rect">
+            <a:avLst/>
+          </a:prstGeom>
+          <a:noFill/>
+          <a:ln/>
+        </p:spPr>
+        <p:txBody>
+          <a:bodyPr wrap="square" lIns="0" tIns="0" rIns="0" bIns="0" rtlCol="0" anchor="ctr"/>
+          <a:lstStyle/>
+          <a:p>
+            <a:pPr marL="0" indent="0" algn="ctr">
+              <a:spcAft>
+                <a:spcPts val="300"/>
+              </a:spcAft>
+              <a:buNone/>
+            </a:pPr>
+            <a:r>
+              <a:rPr lang="en-US" sz="1100" dirty="0" i="0" b="1">
+                <a:solidFill>
+                  <a:srgbClr val="FFFFFF"/>
+                </a:solidFill>
+                <a:latin typeface="Nirmala UI" pitchFamily="34" charset="0"/>
+                <a:ea typeface="Nirmala UI" pitchFamily="34" charset="-122"/>
+                <a:cs typeface="Nirmala UI" pitchFamily="34" charset="-120"/>
+              </a:rPr>
+              <a:t>SH</a:t>
+            </a:r>
+            <a:endParaRPr lang="en-US" sz="700" dirty="0"/>
+          </a:p>
+        </p:txBody>
+      </p:sp>
+      <p:sp>
+        <p:nvSpPr>
+          <p:cNvPr id="27" name="Text 25"/>
+          <p:cNvSpPr txBox="1"/>
+          <p:nvPr/>
+        </p:nvSpPr>
+        <p:spPr>
+          <a:xfrm>
+            <a:off x="3447288" y="2633472"/>
+            <a:ext cx="1280160" cy="256032"/>
           </a:xfrm>
           <a:prstGeom prst="rect">
             <a:avLst/>
@@ -8606,6 +8714,143 @@
               <a:buNone/>
             </a:pPr>
             <a:r>
+              <a:rPr lang="en-US" sz="1050" b="1" dirty="0" i="0">
+                <a:solidFill>
+                  <a:srgbClr val="FFFFFF"/>
+                </a:solidFill>
+                <a:latin typeface="Nirmala UI" pitchFamily="34" charset="0"/>
+                <a:ea typeface="Nirmala UI" pitchFamily="34" charset="-122"/>
+                <a:cs typeface="Nirmala UI" pitchFamily="34" charset="-120"/>
+              </a:rPr>
+              <a:t>Sanchay Hira</a:t>
+            </a:r>
+            <a:endParaRPr lang="en-US" sz="1050" dirty="0"/>
+          </a:p>
+        </p:txBody>
+      </p:sp>
+      <p:sp>
+        <p:nvSpPr>
+          <p:cNvPr id="28" name="Text 26"/>
+          <p:cNvSpPr txBox="1"/>
+          <p:nvPr/>
+        </p:nvSpPr>
+        <p:spPr>
+          <a:xfrm>
+            <a:off x="3447288" y="2889504"/>
+            <a:ext cx="1280160" cy="201168"/>
+          </a:xfrm>
+          <a:prstGeom prst="rect">
+            <a:avLst/>
+          </a:prstGeom>
+          <a:noFill/>
+          <a:ln/>
+        </p:spPr>
+        <p:txBody>
+          <a:bodyPr wrap="square" lIns="0" tIns="0" rIns="0" bIns="0" rtlCol="0" anchor="t"/>
+          <a:lstStyle/>
+          <a:p>
+            <a:pPr marL="0" indent="0">
+              <a:spcAft>
+                <a:spcPts val="300"/>
+              </a:spcAft>
+              <a:buNone/>
+            </a:pPr>
+            <a:r>
+              <a:rPr lang="en-US" sz="900" i="0" dirty="0" b="0">
+                <a:solidFill>
+                  <a:srgbClr val="F28C28"/>
+                </a:solidFill>
+                <a:latin typeface="Nirmala UI" pitchFamily="34" charset="0"/>
+                <a:ea typeface="Nirmala UI" pitchFamily="34" charset="-122"/>
+                <a:cs typeface="Nirmala UI" pitchFamily="34" charset="-120"/>
+              </a:rPr>
+              <a:t>Team member</a:t>
+            </a:r>
+            <a:endParaRPr lang="en-US" sz="900" dirty="0"/>
+          </a:p>
+        </p:txBody>
+      </p:sp>
+      <p:sp>
+        <p:nvSpPr>
+          <p:cNvPr id="29" name="Text 27"/>
+          <p:cNvSpPr txBox="1"/>
+          <p:nvPr/>
+        </p:nvSpPr>
+        <p:spPr>
+          <a:xfrm>
+            <a:off x="3447288" y="3108960"/>
+            <a:ext cx="1280160" cy="411480"/>
+          </a:xfrm>
+          <a:prstGeom prst="rect">
+            <a:avLst/>
+          </a:prstGeom>
+          <a:noFill/>
+          <a:ln/>
+        </p:spPr>
+        <p:txBody>
+          <a:bodyPr wrap="square" lIns="0" tIns="0" rIns="0" bIns="0" rtlCol="0" anchor="t"/>
+          <a:lstStyle/>
+          <a:p>
+            <a:pPr marL="0" indent="0">
+              <a:spcAft>
+                <a:spcPts val="300"/>
+              </a:spcAft>
+              <a:buNone/>
+            </a:pPr>
+            <a:r>
+              <a:rPr lang="en-US" sz="800" i="0" dirty="0" b="0">
+                <a:solidFill>
+                  <a:srgbClr val="C9D2EC"/>
+                </a:solidFill>
+                <a:latin typeface="Nirmala UI" pitchFamily="34" charset="0"/>
+                <a:ea typeface="Nirmala UI" pitchFamily="34" charset="-122"/>
+                <a:cs typeface="Nirmala UI" pitchFamily="34" charset="-120"/>
+              </a:rPr>
+              <a:t/>
+            </a:r>
+            <a:endParaRPr lang="en-US" sz="850" dirty="0"/>
+          </a:p>
+        </p:txBody>
+      </p:sp>
+      <p:sp>
+        <p:nvSpPr>
+          <p:cNvPr id="30" name="Text 28"/>
+          <p:cNvSpPr txBox="1"/>
+          <p:nvPr/>
+        </p:nvSpPr>
+        <p:spPr>
+          <a:xfrm>
+            <a:off x="457200" y="3840480"/>
+            <a:ext cx="4389120" cy="274320"/>
+          </a:xfrm>
+          <a:prstGeom prst="rect">
+            <a:avLst/>
+          </a:prstGeom>
+          <a:noFill/>
+          <a:ln/>
+        </p:spPr>
+        <p:txBody>
+          <a:bodyPr wrap="square" lIns="0" tIns="0" rIns="0" bIns="0" rtlCol="0" anchor="t"/>
+          <a:lstStyle/>
+          <a:p>
+            <a:pPr marL="0" indent="0">
+              <a:spcAft>
+                <a:spcPts val="300"/>
+              </a:spcAft>
+              <a:buNone/>
+            </a:pPr>
+            <a:r>
+              <a:rPr lang="en-US" sz="950" i="0" dirty="0" b="1">
+                <a:solidFill>
+                  <a:srgbClr val="C9D2EC"/>
+                </a:solidFill>
+                <a:latin typeface="Nirmala UI" pitchFamily="34" charset="0"/>
+                <a:ea typeface="Nirmala UI" pitchFamily="34" charset="-122"/>
+                <a:cs typeface="Nirmala UI" pitchFamily="34" charset="-120"/>
+              </a:rPr>
+              <a:t>Mentor: </a:t>
+            </a:r>
+            <a:r>
               <a:rPr lang="en-US" sz="950" i="0" dirty="0" b="0">
                 <a:solidFill>
                   <a:srgbClr val="C9D2EC"/>
@@ -8614,7 +8859,7 @@
                 <a:ea typeface="Nirmala UI" pitchFamily="34" charset="-122"/>
                 <a:cs typeface="Nirmala UI" pitchFamily="34" charset="-120"/>
               </a:rPr>
-              <a:t>Indian Institute of Information Technology, Nagpur</a:t>
+              <a:t>Dr. Swati Hira, Assistant Professor, CSE, IIIT Nagpur</a:t>
             </a:r>
             <a:endParaRPr lang="en-US" sz="950" dirty="0"/>
           </a:p>
